--- a/Week 1 A2/Housing Prices Analysis.pptx
+++ b/Week 1 A2/Housing Prices Analysis.pptx
@@ -108,6 +108,11 @@
       </a:defRPr>
     </a:lvl9pPr>
   </p:defaultTextStyle>
+  <p:extLst>
+    <p:ext uri="{EFAFB233-063F-42B5-8137-9DF3F51BA10A}">
+      <p15:sldGuideLst xmlns:p15="http://schemas.microsoft.com/office/powerpoint/2012/main"/>
+    </p:ext>
+  </p:extLst>
 </p:presentation>
 </file>
 
@@ -12665,8 +12670,8 @@
         </p:nvSpPr>
         <p:spPr>
           <a:xfrm>
-            <a:off x="5967160" y="4707863"/>
-            <a:ext cx="5732971" cy="1200329"/>
+            <a:off x="4735514" y="6003478"/>
+            <a:ext cx="7748819" cy="646331"/>
           </a:xfrm>
           <a:prstGeom prst="rect">
             <a:avLst/>
@@ -12681,14 +12686,14 @@
           <a:p>
             <a:pPr algn="ctr"/>
             <a:r>
-              <a:rPr lang="en-NZ" sz="2400" dirty="0">
+              <a:rPr lang="en-NZ" dirty="0">
                 <a:solidFill>
                   <a:schemeClr val="bg1"/>
                 </a:solidFill>
               </a:rPr>
               <a:t>Size sets the "floor" for the price, but doesn't explain the "ceiling."</a:t>
             </a:r>
-            <a:endParaRPr lang="en-US" sz="2400" dirty="0">
+            <a:endParaRPr lang="en-US" dirty="0">
               <a:solidFill>
                 <a:schemeClr val="bg1"/>
               </a:solidFill>
@@ -12696,7 +12701,7 @@
           </a:p>
           <a:p>
             <a:pPr algn="ctr"/>
-            <a:endParaRPr lang="en-US" sz="2400" dirty="0">
+            <a:endParaRPr lang="en-US" dirty="0">
               <a:solidFill>
                 <a:schemeClr val="bg1"/>
               </a:solidFill>
@@ -12704,6 +12709,36 @@
           </a:p>
         </p:txBody>
       </p:sp>
+      <p:pic>
+        <p:nvPicPr>
+          <p:cNvPr id="41" name="Picture 40">
+            <a:extLst>
+              <a:ext uri="{FF2B5EF4-FFF2-40B4-BE49-F238E27FC236}">
+                <a16:creationId xmlns:a16="http://schemas.microsoft.com/office/drawing/2014/main" id="{0F07B0F6-E088-4D99-1B77-A2E56ECDA74D}"/>
+              </a:ext>
+            </a:extLst>
+          </p:cNvPr>
+          <p:cNvPicPr>
+            <a:picLocks noChangeAspect="1"/>
+          </p:cNvPicPr>
+          <p:nvPr/>
+        </p:nvPicPr>
+        <p:blipFill>
+          <a:blip r:embed="rId9"/>
+          <a:stretch>
+            <a:fillRect/>
+          </a:stretch>
+        </p:blipFill>
+        <p:spPr>
+          <a:xfrm>
+            <a:off x="5967160" y="2620064"/>
+            <a:ext cx="5322632" cy="3269826"/>
+          </a:xfrm>
+          <a:prstGeom prst="rect">
+            <a:avLst/>
+          </a:prstGeom>
+        </p:spPr>
+      </p:pic>
     </p:spTree>
     <p:extLst>
       <p:ext uri="{BB962C8B-B14F-4D97-AF65-F5344CB8AC3E}">
@@ -15247,7 +15282,26 @@
             </a:r>
             <a:r>
               <a:rPr lang="en-NZ" dirty="0"/>
-              <a:t> Data shows that comfort and location outweigh raw square footage in the high-end market.</a:t>
+              <a:t> Data shows that comfort and location outweigh raw square footage in </a:t>
+            </a:r>
+            <a:r>
+              <a:rPr lang="en-NZ"/>
+              <a:t>the </a:t>
+            </a:r>
+          </a:p>
+          <a:p>
+            <a:pPr algn="ctr">
+              <a:lnSpc>
+                <a:spcPct val="100000"/>
+              </a:lnSpc>
+            </a:pPr>
+            <a:r>
+              <a:rPr lang="en-NZ"/>
+              <a:t>high-end </a:t>
+            </a:r>
+            <a:r>
+              <a:rPr lang="en-NZ" dirty="0"/>
+              <a:t>market.</a:t>
             </a:r>
           </a:p>
           <a:p>
